--- a/CNC-Plasma/assets/downloads/module-02-classroom.pptx
+++ b/CNC-Plasma/assets/downloads/module-02-classroom.pptx
@@ -2,20 +2,20 @@
 <file path=ppt/presentation.xml><?xml version="1.0" encoding="utf-8"?>
 <p:presentation xmlns:p="http://schemas.openxmlformats.org/presentationml/2006/main">
   <p:sldMasterIdLst>
-    <p:sldMasterId xmlns:r="http://schemas.openxmlformats.org/officeDocument/2006/relationships" id="2147483648" r:id="R528365f7cf364751"/>
+    <p:sldMasterId xmlns:r="http://schemas.openxmlformats.org/officeDocument/2006/relationships" id="2147483648" r:id="R0b59548312e94884"/>
   </p:sldMasterIdLst>
   <p:notesMasterIdLst>
-    <p:notesMasterId xmlns:r="http://schemas.openxmlformats.org/officeDocument/2006/relationships" r:id="Ra9d677590ea344ef"/>
+    <p:notesMasterId xmlns:r="http://schemas.openxmlformats.org/officeDocument/2006/relationships" r:id="R83574f3fa8cb4ba6"/>
   </p:notesMasterIdLst>
   <p:sldIdLst>
-    <p:sldId xmlns:r="http://schemas.openxmlformats.org/officeDocument/2006/relationships" id="256" r:id="Rdc8d5adde5f0454e"/>
-    <p:sldId xmlns:r="http://schemas.openxmlformats.org/officeDocument/2006/relationships" id="257" r:id="Ra1281860686e4b3f"/>
-    <p:sldId xmlns:r="http://schemas.openxmlformats.org/officeDocument/2006/relationships" id="258" r:id="R07512da903a24543"/>
-    <p:sldId xmlns:r="http://schemas.openxmlformats.org/officeDocument/2006/relationships" id="259" r:id="R04a16782e9b041b3"/>
-    <p:sldId xmlns:r="http://schemas.openxmlformats.org/officeDocument/2006/relationships" id="260" r:id="R11bd472695cc4603"/>
-    <p:sldId xmlns:r="http://schemas.openxmlformats.org/officeDocument/2006/relationships" id="261" r:id="Rb3c7909ccb774a94"/>
-    <p:sldId xmlns:r="http://schemas.openxmlformats.org/officeDocument/2006/relationships" id="262" r:id="Rac28627e3880417a"/>
-    <p:sldId xmlns:r="http://schemas.openxmlformats.org/officeDocument/2006/relationships" id="263" r:id="R1dcd0a06a98c4541"/>
+    <p:sldId xmlns:r="http://schemas.openxmlformats.org/officeDocument/2006/relationships" id="256" r:id="Ra4d7e748577f43c7"/>
+    <p:sldId xmlns:r="http://schemas.openxmlformats.org/officeDocument/2006/relationships" id="257" r:id="R53b40e07b27e47f6"/>
+    <p:sldId xmlns:r="http://schemas.openxmlformats.org/officeDocument/2006/relationships" id="258" r:id="R80fafbfb4df84c17"/>
+    <p:sldId xmlns:r="http://schemas.openxmlformats.org/officeDocument/2006/relationships" id="259" r:id="R52df25260bb44798"/>
+    <p:sldId xmlns:r="http://schemas.openxmlformats.org/officeDocument/2006/relationships" id="260" r:id="Rbec7d81a470640dc"/>
+    <p:sldId xmlns:r="http://schemas.openxmlformats.org/officeDocument/2006/relationships" id="261" r:id="R37150b8ce963473b"/>
+    <p:sldId xmlns:r="http://schemas.openxmlformats.org/officeDocument/2006/relationships" id="262" r:id="R809fe0c8ba604a4a"/>
+    <p:sldId xmlns:r="http://schemas.openxmlformats.org/officeDocument/2006/relationships" id="263" r:id="Rfb2bd59776ad48f0"/>
   </p:sldIdLst>
   <p:sldSz cx="12192000" cy="6858000"/>
   <p:notesSz cx="6858000" cy="9144000"/>
@@ -472,6 +472,26 @@
               <a:t>Original course diagram.</a:t>
             </a:r>
           </a:p>
+          <a:p xmlns:a="http://schemas.openxmlformats.org/drawingml/2006/main">
+            <a:r>
+              <a:t/>
+            </a:r>
+          </a:p>
+          <a:p xmlns:a="http://schemas.openxmlformats.org/drawingml/2006/main">
+            <a:r>
+              <a:t/>
+            </a:r>
+          </a:p>
+          <a:p xmlns:a="http://schemas.openxmlformats.org/drawingml/2006/main">
+            <a:r>
+              <a:t>ILLUSTRATIVE IMAGE</a:t>
+            </a:r>
+          </a:p>
+          <a:p xmlns:a="http://schemas.openxmlformats.org/drawingml/2006/main">
+            <a:r>
+              <a:t>AI-generated concept illustration for Design something that can be cut. This illustration supports discussion and is not a photograph of the school installation, a software screenshot, or a machine-setting guide. Original source reference images remain on this slide where present.</a:t>
+            </a:r>
+          </a:p>
         </p:txBody>
       </p:sp>
       <p:sp>
@@ -557,6 +577,26 @@
               <a:t>m02-s03: Justify a revision to the proposed equipment-label concept using its intended user, purpose and two checkable criteria. Explain the evidence you would collect, the requirements that need confirmation before production, and how you would avoid claiming a physical result from digital evidence alone.</a:t>
             </a:r>
           </a:p>
+          <a:p xmlns:a="http://schemas.openxmlformats.org/drawingml/2006/main">
+            <a:r>
+              <a:t/>
+            </a:r>
+          </a:p>
+          <a:p xmlns:a="http://schemas.openxmlformats.org/drawingml/2006/main">
+            <a:r>
+              <a:t/>
+            </a:r>
+          </a:p>
+          <a:p xmlns:a="http://schemas.openxmlformats.org/drawingml/2006/main">
+            <a:r>
+              <a:t>ILLUSTRATIVE IMAGE</a:t>
+            </a:r>
+          </a:p>
+          <a:p xmlns:a="http://schemas.openxmlformats.org/drawingml/2006/main">
+            <a:r>
+              <a:t>AI-generated concept illustration for Today’s learning map. This illustration supports discussion and is not a photograph of the school installation, a software screenshot, or a machine-setting guide. Original source reference images remain on this slide where present.</a:t>
+            </a:r>
+          </a:p>
         </p:txBody>
       </p:sp>
       <p:sp>
@@ -727,6 +767,26 @@
               <a:t>Use the section’s ten questions for individual retrieval and feedback. Do not infer practical competence from online completion.</a:t>
             </a:r>
           </a:p>
+          <a:p xmlns:a="http://schemas.openxmlformats.org/drawingml/2006/main">
+            <a:r>
+              <a:t/>
+            </a:r>
+          </a:p>
+          <a:p xmlns:a="http://schemas.openxmlformats.org/drawingml/2006/main">
+            <a:r>
+              <a:t/>
+            </a:r>
+          </a:p>
+          <a:p xmlns:a="http://schemas.openxmlformats.org/drawingml/2006/main">
+            <a:r>
+              <a:t>ILLUSTRATIVE IMAGE</a:t>
+            </a:r>
+          </a:p>
+          <a:p xmlns:a="http://schemas.openxmlformats.org/drawingml/2006/main">
+            <a:r>
+              <a:t>AI-generated concept illustration for Make the drawing deliberate. This illustration supports discussion and is not a photograph of the school installation, a software screenshot, or a machine-setting guide. Original source reference images remain on this slide where present.</a:t>
+            </a:r>
+          </a:p>
         </p:txBody>
       </p:sp>
       <p:sp>
@@ -897,6 +957,26 @@
               <a:t>Use the section’s ten questions for individual retrieval and feedback. Do not infer practical competence from online completion.</a:t>
             </a:r>
           </a:p>
+          <a:p xmlns:a="http://schemas.openxmlformats.org/drawingml/2006/main">
+            <a:r>
+              <a:t/>
+            </a:r>
+          </a:p>
+          <a:p xmlns:a="http://schemas.openxmlformats.org/drawingml/2006/main">
+            <a:r>
+              <a:t/>
+            </a:r>
+          </a:p>
+          <a:p xmlns:a="http://schemas.openxmlformats.org/drawingml/2006/main">
+            <a:r>
+              <a:t>ILLUSTRATIVE IMAGE</a:t>
+            </a:r>
+          </a:p>
+          <a:p xmlns:a="http://schemas.openxmlformats.org/drawingml/2006/main">
+            <a:r>
+              <a:t>AI-generated concept illustration for A small gap changes the profile. This illustration supports discussion and is not a photograph of the school installation, a software screenshot, or a machine-setting guide. Original source reference images remain on this slide where present.</a:t>
+            </a:r>
+          </a:p>
         </p:txBody>
       </p:sp>
       <p:sp>
@@ -1067,6 +1147,26 @@
               <a:t>Use the section’s ten questions for individual retrieval and feedback. Do not infer practical competence from online completion.</a:t>
             </a:r>
           </a:p>
+          <a:p xmlns:a="http://schemas.openxmlformats.org/drawingml/2006/main">
+            <a:r>
+              <a:t/>
+            </a:r>
+          </a:p>
+          <a:p xmlns:a="http://schemas.openxmlformats.org/drawingml/2006/main">
+            <a:r>
+              <a:t/>
+            </a:r>
+          </a:p>
+          <a:p xmlns:a="http://schemas.openxmlformats.org/drawingml/2006/main">
+            <a:r>
+              <a:t>ILLUSTRATIVE IMAGE</a:t>
+            </a:r>
+          </a:p>
+          <a:p xmlns:a="http://schemas.openxmlformats.org/drawingml/2006/main">
+            <a:r>
+              <a:t>AI-generated concept illustration for Design for what remains. This illustration supports discussion and is not a photograph of the school installation, a software screenshot, or a machine-setting guide. Original source reference images remain on this slide where present.</a:t>
+            </a:r>
+          </a:p>
         </p:txBody>
       </p:sp>
       <p:sp>
@@ -1152,6 +1252,26 @@
               <a:t>Follow a solid path from each centre to the surrounding plate.</a:t>
             </a:r>
           </a:p>
+          <a:p xmlns:a="http://schemas.openxmlformats.org/drawingml/2006/main">
+            <a:r>
+              <a:t/>
+            </a:r>
+          </a:p>
+          <a:p xmlns:a="http://schemas.openxmlformats.org/drawingml/2006/main">
+            <a:r>
+              <a:t/>
+            </a:r>
+          </a:p>
+          <a:p xmlns:a="http://schemas.openxmlformats.org/drawingml/2006/main">
+            <a:r>
+              <a:t>ILLUSTRATIVE IMAGE</a:t>
+            </a:r>
+          </a:p>
+          <a:p xmlns:a="http://schemas.openxmlformats.org/drawingml/2006/main">
+            <a:r>
+              <a:t>AI-generated concept illustration for Pause before looking back. This illustration supports discussion and is not a photograph of the school installation, a software screenshot, or a machine-setting guide. Original source reference images remain on this slide where present.</a:t>
+            </a:r>
+          </a:p>
         </p:txBody>
       </p:sp>
       <p:sp>
@@ -1247,6 +1367,26 @@
               <a:t>Keeps manufacturing approval and operation within the teacher’s process.</a:t>
             </a:r>
           </a:p>
+          <a:p xmlns:a="http://schemas.openxmlformats.org/drawingml/2006/main">
+            <a:r>
+              <a:t/>
+            </a:r>
+          </a:p>
+          <a:p xmlns:a="http://schemas.openxmlformats.org/drawingml/2006/main">
+            <a:r>
+              <a:t/>
+            </a:r>
+          </a:p>
+          <a:p xmlns:a="http://schemas.openxmlformats.org/drawingml/2006/main">
+            <a:r>
+              <a:t>ILLUSTRATIVE IMAGE</a:t>
+            </a:r>
+          </a:p>
+          <a:p xmlns:a="http://schemas.openxmlformats.org/drawingml/2006/main">
+            <a:r>
+              <a:t>AI-generated concept illustration for Explain your decision with evidence. This illustration supports discussion and is not a photograph of the school installation, a software screenshot, or a machine-setting guide. Original source reference images remain on this slide where present.</a:t>
+            </a:r>
+          </a:p>
         </p:txBody>
       </p:sp>
       <p:sp>
@@ -1315,6 +1455,26 @@
           <a:p xmlns:a="http://schemas.openxmlformats.org/drawingml/2006/main">
             <a:r>
               <a:t>Open modules/module-02.html#module-02-review. Review completion and feedback rather than treating checked answers as a competence result. Keep original CAD files separately. Students should state their own contribution and identify teacher-controlled production honestly.</a:t>
+            </a:r>
+          </a:p>
+          <a:p xmlns:a="http://schemas.openxmlformats.org/drawingml/2006/main">
+            <a:r>
+              <a:t/>
+            </a:r>
+          </a:p>
+          <a:p xmlns:a="http://schemas.openxmlformats.org/drawingml/2006/main">
+            <a:r>
+              <a:t/>
+            </a:r>
+          </a:p>
+          <a:p xmlns:a="http://schemas.openxmlformats.org/drawingml/2006/main">
+            <a:r>
+              <a:t>ILLUSTRATIVE IMAGE</a:t>
+            </a:r>
+          </a:p>
+          <a:p xmlns:a="http://schemas.openxmlformats.org/drawingml/2006/main">
+            <a:r>
+              <a:t>AI-generated concept illustration for Leave with something useful. This illustration supports discussion and is not a photograph of the school installation, a software screenshot, or a machine-setting guide. Original source reference images remain on this slide where present.</a:t>
             </a:r>
           </a:p>
         </p:txBody>
@@ -1382,7 +1542,7 @@
   </p:cSld>
   <p:clrMap bg1="lt1" tx1="dk1" bg2="lt2" tx2="dk2" accent1="accent1" accent2="accent2" accent3="accent3" accent4="accent4" accent5="accent5" accent6="accent6" hlink="hlink" folHlink="folHlink"/>
   <p:sldLayoutIdLst>
-    <p:sldLayoutId xmlns:r="http://schemas.openxmlformats.org/officeDocument/2006/relationships" id="2147483649" r:id="R8495c3a4cc1949ca"/>
+    <p:sldLayoutId xmlns:r="http://schemas.openxmlformats.org/officeDocument/2006/relationships" id="2147483649" r:id="R3cb77f6dfdd84ada"/>
   </p:sldLayoutIdLst>
   <p:txStyles>
     <p:titleStyle>
@@ -1992,6 +2152,7 @@
           <a:lstStyle xmlns:a="http://schemas.openxmlformats.org/drawingml/2006/main"/>
           <a:p xmlns:a="http://schemas.openxmlformats.org/drawingml/2006/main">
             <a:pPr>
+              <a:buNone/>
               <a:defRPr sz="1200" b="1">
                 <a:solidFill>
                   <a:srgbClr val="2F6079"/>
@@ -2049,6 +2210,7 @@
           <a:lstStyle xmlns:a="http://schemas.openxmlformats.org/drawingml/2006/main"/>
           <a:p xmlns:a="http://schemas.openxmlformats.org/drawingml/2006/main">
             <a:pPr>
+              <a:buNone/>
               <a:defRPr sz="1050" b="0">
                 <a:solidFill>
                   <a:srgbClr val="526571"/>
@@ -2106,6 +2268,7 @@
           <a:lstStyle xmlns:a="http://schemas.openxmlformats.org/drawingml/2006/main"/>
           <a:p xmlns:a="http://schemas.openxmlformats.org/drawingml/2006/main">
             <a:pPr>
+              <a:buNone/>
               <a:defRPr sz="1125" b="1">
                 <a:solidFill>
                   <a:srgbClr val="2F6079"/>
@@ -2163,6 +2326,7 @@
           <a:lstStyle xmlns:a="http://schemas.openxmlformats.org/drawingml/2006/main"/>
           <a:p xmlns:a="http://schemas.openxmlformats.org/drawingml/2006/main">
             <a:pPr>
+              <a:buNone/>
               <a:defRPr sz="3525" b="1">
                 <a:solidFill>
                   <a:srgbClr val="18303F"/>
@@ -2220,6 +2384,7 @@
           <a:lstStyle xmlns:a="http://schemas.openxmlformats.org/drawingml/2006/main"/>
           <a:p xmlns:a="http://schemas.openxmlformats.org/drawingml/2006/main">
             <a:pPr>
+              <a:buNone/>
               <a:defRPr sz="2025" b="0">
                 <a:solidFill>
                   <a:srgbClr val="18303F"/>
@@ -2277,6 +2442,7 @@
           <a:lstStyle xmlns:a="http://schemas.openxmlformats.org/drawingml/2006/main"/>
           <a:p xmlns:a="http://schemas.openxmlformats.org/drawingml/2006/main">
             <a:pPr>
+              <a:buNone/>
               <a:defRPr sz="1725" b="1">
                 <a:solidFill>
                   <a:srgbClr val="2F6079"/>
@@ -2317,7 +2483,7 @@
         <p:spPr>
           <a:xfrm xmlns:a="http://schemas.openxmlformats.org/drawingml/2006/main">
             <a:off x="6334125" y="1009650"/>
-            <a:ext cx="5314950" cy="4933950"/>
+            <a:ext cx="5314950" cy="4400550"/>
           </a:xfrm>
           <a:prstGeom xmlns:a="http://schemas.openxmlformats.org/drawingml/2006/main" prst="rect">
             <a:avLst/>
@@ -2332,20 +2498,20 @@
       </p:sp>
       <p:pic>
         <p:nvPicPr>
-          <p:cNvPr id="19" name=""/>
+          <p:cNvPr id="21" name=""/>
           <p:cNvPicPr>
             <a:picLocks xmlns:a="http://schemas.openxmlformats.org/drawingml/2006/main" noChangeAspect="1"/>
           </p:cNvPicPr>
           <p:nvPr/>
         </p:nvPicPr>
         <p:blipFill>
-          <a:blip xmlns:r="http://schemas.openxmlformats.org/officeDocument/2006/relationships" xmlns:a="http://schemas.openxmlformats.org/drawingml/2006/main" r:embed="Rc9fd5d4754c94d8c"/>
+          <a:blip xmlns:r="http://schemas.openxmlformats.org/officeDocument/2006/relationships" xmlns:a="http://schemas.openxmlformats.org/drawingml/2006/main" r:embed="Rc7c350efc2fd49bd"/>
           <a:stretch xmlns:a="http://schemas.openxmlformats.org/drawingml/2006/main"/>
         </p:blipFill>
         <p:spPr>
           <a:xfrm xmlns:a="http://schemas.openxmlformats.org/drawingml/2006/main">
-            <a:off x="6524625" y="1650682"/>
-            <a:ext cx="4933950" cy="2889885"/>
+            <a:off x="6524625" y="1341438"/>
+            <a:ext cx="4933950" cy="3289300"/>
           </a:xfrm>
           <a:prstGeom xmlns:a="http://schemas.openxmlformats.org/drawingml/2006/main" prst="rect">
             <a:avLst/>
@@ -2368,8 +2534,8 @@
         </p:nvSpPr>
         <p:spPr>
           <a:xfrm xmlns:a="http://schemas.openxmlformats.org/drawingml/2006/main">
-            <a:off x="6543675" y="5238750"/>
-            <a:ext cx="4857750" cy="523875"/>
+            <a:off x="6524625" y="4895850"/>
+            <a:ext cx="4933950" cy="381000"/>
           </a:xfrm>
           <a:prstGeom xmlns:a="http://schemas.openxmlformats.org/drawingml/2006/main" prst="rect">
             <a:avLst/>
@@ -2386,9 +2552,10 @@
           <a:lstStyle xmlns:a="http://schemas.openxmlformats.org/drawingml/2006/main"/>
           <a:p xmlns:a="http://schemas.openxmlformats.org/drawingml/2006/main">
             <a:pPr>
+              <a:buNone/>
               <a:defRPr sz="1275" b="0">
                 <a:solidFill>
-                  <a:srgbClr val="526571"/>
+                  <a:srgbClr val="18303F"/>
                 </a:solidFill>
                 <a:latin typeface="Arial"/>
                 <a:ea typeface="Arial"/>
@@ -2398,13 +2565,13 @@
             <a:r>
               <a:rPr sz="1275" b="0">
                 <a:solidFill>
-                  <a:srgbClr val="526571"/>
-                </a:solidFill>
-                <a:latin typeface="Arial"/>
-                <a:ea typeface="Arial"/>
-                <a:cs typeface="Arial"/>
-              </a:rPr>
-              <a:t>Source reference / teaching example</a:t>
+                  <a:srgbClr val="18303F"/>
+                </a:solidFill>
+                <a:latin typeface="Arial"/>
+                <a:ea typeface="Arial"/>
+                <a:cs typeface="Arial"/>
+              </a:rPr>
+              <a:t>AI-generated concept image</a:t>
             </a:r>
           </a:p>
         </p:txBody>
@@ -2502,6 +2669,7 @@
           <a:lstStyle xmlns:a="http://schemas.openxmlformats.org/drawingml/2006/main"/>
           <a:p xmlns:a="http://schemas.openxmlformats.org/drawingml/2006/main">
             <a:pPr>
+              <a:buNone/>
               <a:defRPr sz="1200" b="1">
                 <a:solidFill>
                   <a:srgbClr val="2F6079"/>
@@ -2559,6 +2727,7 @@
           <a:lstStyle xmlns:a="http://schemas.openxmlformats.org/drawingml/2006/main"/>
           <a:p xmlns:a="http://schemas.openxmlformats.org/drawingml/2006/main">
             <a:pPr>
+              <a:buNone/>
               <a:defRPr sz="1050" b="0">
                 <a:solidFill>
                   <a:srgbClr val="526571"/>
@@ -2616,6 +2785,7 @@
           <a:lstStyle xmlns:a="http://schemas.openxmlformats.org/drawingml/2006/main"/>
           <a:p xmlns:a="http://schemas.openxmlformats.org/drawingml/2006/main">
             <a:pPr>
+              <a:buNone/>
               <a:defRPr sz="1125" b="1">
                 <a:solidFill>
                   <a:srgbClr val="2F6079"/>
@@ -2673,6 +2843,7 @@
           <a:lstStyle xmlns:a="http://schemas.openxmlformats.org/drawingml/2006/main"/>
           <a:p xmlns:a="http://schemas.openxmlformats.org/drawingml/2006/main">
             <a:pPr>
+              <a:buNone/>
               <a:defRPr sz="3225" b="1">
                 <a:solidFill>
                   <a:srgbClr val="18303F"/>
@@ -2730,6 +2901,7 @@
           <a:lstStyle xmlns:a="http://schemas.openxmlformats.org/drawingml/2006/main"/>
           <a:p xmlns:a="http://schemas.openxmlformats.org/drawingml/2006/main">
             <a:pPr>
+              <a:buNone/>
               <a:defRPr sz="3450" b="1">
                 <a:solidFill>
                   <a:srgbClr val="2F6079"/>
@@ -2770,7 +2942,7 @@
         <p:spPr>
           <a:xfrm xmlns:a="http://schemas.openxmlformats.org/drawingml/2006/main">
             <a:off x="1562100" y="2143125"/>
-            <a:ext cx="9620250" cy="742950"/>
+            <a:ext cx="6096000" cy="952500"/>
           </a:xfrm>
           <a:prstGeom xmlns:a="http://schemas.openxmlformats.org/drawingml/2006/main" prst="rect">
             <a:avLst/>
@@ -2787,7 +2959,8 @@
           <a:lstStyle xmlns:a="http://schemas.openxmlformats.org/drawingml/2006/main"/>
           <a:p xmlns:a="http://schemas.openxmlformats.org/drawingml/2006/main">
             <a:pPr>
-              <a:defRPr sz="2175" b="1">
+              <a:buNone/>
+              <a:defRPr sz="2100" b="1">
                 <a:solidFill>
                   <a:srgbClr val="18303F"/>
                 </a:solidFill>
@@ -2797,7 +2970,7 @@
               </a:defRPr>
             </a:pPr>
             <a:r>
-              <a:rPr sz="2175" b="1">
+              <a:rPr sz="2100" b="1">
                 <a:solidFill>
                   <a:srgbClr val="18303F"/>
                 </a:solidFill>
@@ -2844,6 +3017,7 @@
           <a:lstStyle xmlns:a="http://schemas.openxmlformats.org/drawingml/2006/main"/>
           <a:p xmlns:a="http://schemas.openxmlformats.org/drawingml/2006/main">
             <a:pPr>
+              <a:buNone/>
               <a:defRPr sz="3450" b="1">
                 <a:solidFill>
                   <a:srgbClr val="2F6079"/>
@@ -2884,7 +3058,7 @@
         <p:spPr>
           <a:xfrm xmlns:a="http://schemas.openxmlformats.org/drawingml/2006/main">
             <a:off x="1562100" y="3286125"/>
-            <a:ext cx="9620250" cy="742950"/>
+            <a:ext cx="6096000" cy="952500"/>
           </a:xfrm>
           <a:prstGeom xmlns:a="http://schemas.openxmlformats.org/drawingml/2006/main" prst="rect">
             <a:avLst/>
@@ -2901,7 +3075,8 @@
           <a:lstStyle xmlns:a="http://schemas.openxmlformats.org/drawingml/2006/main"/>
           <a:p xmlns:a="http://schemas.openxmlformats.org/drawingml/2006/main">
             <a:pPr>
-              <a:defRPr sz="2175" b="1">
+              <a:buNone/>
+              <a:defRPr sz="2100" b="1">
                 <a:solidFill>
                   <a:srgbClr val="18303F"/>
                 </a:solidFill>
@@ -2911,7 +3086,7 @@
               </a:defRPr>
             </a:pPr>
             <a:r>
-              <a:rPr sz="2175" b="1">
+              <a:rPr sz="2100" b="1">
                 <a:solidFill>
                   <a:srgbClr val="18303F"/>
                 </a:solidFill>
@@ -2958,6 +3133,7 @@
           <a:lstStyle xmlns:a="http://schemas.openxmlformats.org/drawingml/2006/main"/>
           <a:p xmlns:a="http://schemas.openxmlformats.org/drawingml/2006/main">
             <a:pPr>
+              <a:buNone/>
               <a:defRPr sz="3450" b="1">
                 <a:solidFill>
                   <a:srgbClr val="2F6079"/>
@@ -2998,7 +3174,7 @@
         <p:spPr>
           <a:xfrm xmlns:a="http://schemas.openxmlformats.org/drawingml/2006/main">
             <a:off x="1562100" y="4429125"/>
-            <a:ext cx="9620250" cy="742950"/>
+            <a:ext cx="6096000" cy="952500"/>
           </a:xfrm>
           <a:prstGeom xmlns:a="http://schemas.openxmlformats.org/drawingml/2006/main" prst="rect">
             <a:avLst/>
@@ -3015,7 +3191,8 @@
           <a:lstStyle xmlns:a="http://schemas.openxmlformats.org/drawingml/2006/main"/>
           <a:p xmlns:a="http://schemas.openxmlformats.org/drawingml/2006/main">
             <a:pPr>
-              <a:defRPr sz="2175" b="1">
+              <a:buNone/>
+              <a:defRPr sz="2100" b="1">
                 <a:solidFill>
                   <a:srgbClr val="18303F"/>
                 </a:solidFill>
@@ -3025,7 +3202,7 @@
               </a:defRPr>
             </a:pPr>
             <a:r>
-              <a:rPr sz="2175" b="1">
+              <a:rPr sz="2100" b="1">
                 <a:solidFill>
                   <a:srgbClr val="18303F"/>
                 </a:solidFill>
@@ -3072,6 +3249,7 @@
           <a:lstStyle xmlns:a="http://schemas.openxmlformats.org/drawingml/2006/main"/>
           <a:p xmlns:a="http://schemas.openxmlformats.org/drawingml/2006/main">
             <a:pPr>
+              <a:buNone/>
               <a:defRPr sz="1725" b="0">
                 <a:solidFill>
                   <a:srgbClr val="2F6079"/>
@@ -3091,6 +3269,85 @@
                 <a:cs typeface="Arial"/>
               </a:rPr>
               <a:t>Before we begin: which step in the workflow needs the strongest check?</a:t>
+            </a:r>
+          </a:p>
+        </p:txBody>
+      </p:sp>
+      <p:pic>
+        <p:nvPicPr>
+          <p:cNvPr id="28" name=""/>
+          <p:cNvPicPr>
+            <a:picLocks xmlns:a="http://schemas.openxmlformats.org/drawingml/2006/main" noChangeAspect="1"/>
+          </p:cNvPicPr>
+          <p:nvPr/>
+        </p:nvPicPr>
+        <p:blipFill>
+          <a:blip xmlns:r="http://schemas.openxmlformats.org/officeDocument/2006/relationships" xmlns:a="http://schemas.openxmlformats.org/drawingml/2006/main" r:embed="Rdc36e31d580043a2"/>
+          <a:stretch xmlns:a="http://schemas.openxmlformats.org/drawingml/2006/main"/>
+        </p:blipFill>
+        <p:spPr>
+          <a:xfrm xmlns:a="http://schemas.openxmlformats.org/drawingml/2006/main">
+            <a:off x="7858125" y="2444750"/>
+            <a:ext cx="3810000" cy="2540000"/>
+          </a:xfrm>
+          <a:prstGeom xmlns:a="http://schemas.openxmlformats.org/drawingml/2006/main" prst="rect">
+            <a:avLst/>
+          </a:prstGeom>
+        </p:spPr>
+      </p:pic>
+      <p:sp>
+        <p:nvSpPr>
+          <p:cNvPr id="15" name="">
+            <a:extLst xmlns:a="http://schemas.openxmlformats.org/drawingml/2006/main">
+              <a:ext uri="{FF2B5EF4-FFF2-40B4-BE49-F238E27FC236}">
+                <a16:creationId xmlns:a16="http://schemas.microsoft.com/office/drawing/2014/main" id="{FE5E97AE-F833-40CA-8672-D83139F8AD4C}"/>
+              </a:ext>
+            </a:extLst>
+          </p:cNvPr>
+          <p:cNvSpPr>
+            <a:spLocks xmlns:a="http://schemas.openxmlformats.org/drawingml/2006/main" noGrp="1"/>
+          </p:cNvSpPr>
+          <p:nvPr/>
+        </p:nvSpPr>
+        <p:spPr>
+          <a:xfrm xmlns:a="http://schemas.openxmlformats.org/drawingml/2006/main">
+            <a:off x="7858125" y="5562600"/>
+            <a:ext cx="3810000" cy="171450"/>
+          </a:xfrm>
+          <a:prstGeom xmlns:a="http://schemas.openxmlformats.org/drawingml/2006/main" prst="rect">
+            <a:avLst/>
+          </a:prstGeom>
+          <a:noFill xmlns:a="http://schemas.openxmlformats.org/drawingml/2006/main"/>
+          <a:ln xmlns:a="http://schemas.openxmlformats.org/drawingml/2006/main" w="0">
+            <a:noFill/>
+          </a:ln>
+        </p:spPr>
+        <p:txBody>
+          <a:bodyPr xmlns:a="http://schemas.openxmlformats.org/drawingml/2006/main">
+            <a:noAutofit/>
+          </a:bodyPr>
+          <a:lstStyle xmlns:a="http://schemas.openxmlformats.org/drawingml/2006/main"/>
+          <a:p xmlns:a="http://schemas.openxmlformats.org/drawingml/2006/main">
+            <a:pPr>
+              <a:defRPr sz="900">
+                <a:solidFill>
+                  <a:srgbClr val="526571"/>
+                </a:solidFill>
+                <a:latin typeface="Arial"/>
+                <a:ea typeface="Arial"/>
+                <a:cs typeface="Arial"/>
+              </a:defRPr>
+            </a:pPr>
+            <a:r>
+              <a:rPr sz="900">
+                <a:solidFill>
+                  <a:srgbClr val="526571"/>
+                </a:solidFill>
+                <a:latin typeface="Arial"/>
+                <a:ea typeface="Arial"/>
+                <a:cs typeface="Arial"/>
+              </a:rPr>
+              <a:t>AI-generated concept image</a:t>
             </a:r>
           </a:p>
         </p:txBody>
@@ -3188,6 +3445,7 @@
           <a:lstStyle xmlns:a="http://schemas.openxmlformats.org/drawingml/2006/main"/>
           <a:p xmlns:a="http://schemas.openxmlformats.org/drawingml/2006/main">
             <a:pPr>
+              <a:buNone/>
               <a:defRPr sz="1200" b="1">
                 <a:solidFill>
                   <a:srgbClr val="2F6079"/>
@@ -3245,6 +3503,7 @@
           <a:lstStyle xmlns:a="http://schemas.openxmlformats.org/drawingml/2006/main"/>
           <a:p xmlns:a="http://schemas.openxmlformats.org/drawingml/2006/main">
             <a:pPr>
+              <a:buNone/>
               <a:defRPr sz="1050" b="0">
                 <a:solidFill>
                   <a:srgbClr val="526571"/>
@@ -3302,6 +3561,7 @@
           <a:lstStyle xmlns:a="http://schemas.openxmlformats.org/drawingml/2006/main"/>
           <a:p xmlns:a="http://schemas.openxmlformats.org/drawingml/2006/main">
             <a:pPr>
+              <a:buNone/>
               <a:defRPr sz="1125" b="1">
                 <a:solidFill>
                   <a:srgbClr val="2F6079"/>
@@ -3359,6 +3619,7 @@
           <a:lstStyle xmlns:a="http://schemas.openxmlformats.org/drawingml/2006/main"/>
           <a:p xmlns:a="http://schemas.openxmlformats.org/drawingml/2006/main">
             <a:pPr>
+              <a:buNone/>
               <a:defRPr sz="2850" b="1">
                 <a:solidFill>
                   <a:srgbClr val="18303F"/>
@@ -3416,6 +3677,7 @@
           <a:lstStyle xmlns:a="http://schemas.openxmlformats.org/drawingml/2006/main"/>
           <a:p xmlns:a="http://schemas.openxmlformats.org/drawingml/2006/main">
             <a:pPr>
+              <a:buNone/>
               <a:defRPr sz="1875" b="0">
                 <a:solidFill>
                   <a:srgbClr val="18303F"/>
@@ -3444,6 +3706,7 @@
           </a:p>
           <a:p xmlns:a="http://schemas.openxmlformats.org/drawingml/2006/main">
             <a:pPr>
+              <a:buNone/>
               <a:defRPr sz="1875" b="0">
                 <a:solidFill>
                   <a:srgbClr val="18303F"/>
@@ -3483,8 +3746,8 @@
         </p:nvSpPr>
         <p:spPr>
           <a:xfrm xmlns:a="http://schemas.openxmlformats.org/drawingml/2006/main">
-            <a:off x="5810250" y="1962150"/>
-            <a:ext cx="5857875" cy="3238500"/>
+            <a:off x="5810250" y="1714500"/>
+            <a:ext cx="5857875" cy="2876550"/>
           </a:xfrm>
           <a:prstGeom xmlns:a="http://schemas.openxmlformats.org/drawingml/2006/main" prst="rect">
             <a:avLst/>
@@ -3499,20 +3762,21 @@
       </p:sp>
       <p:pic>
         <p:nvPicPr>
-          <p:cNvPr id="18" name=""/>
+          <p:cNvPr id="22" name=""/>
           <p:cNvPicPr>
             <a:picLocks xmlns:a="http://schemas.openxmlformats.org/drawingml/2006/main" noChangeAspect="1"/>
           </p:cNvPicPr>
           <p:nvPr/>
         </p:nvPicPr>
         <p:blipFill>
-          <a:blip xmlns:r="http://schemas.openxmlformats.org/officeDocument/2006/relationships" xmlns:a="http://schemas.openxmlformats.org/drawingml/2006/main" r:embed="Rc6f728c226374b6e"/>
+          <a:blip xmlns:r="http://schemas.openxmlformats.org/officeDocument/2006/relationships" xmlns:a="http://schemas.openxmlformats.org/drawingml/2006/main" r:embed="Rc53f10465048469c"/>
+          <a:srcRect xmlns:a="http://schemas.openxmlformats.org/drawingml/2006/main" l="0" t="0" r="0" b="0"/>
           <a:stretch xmlns:a="http://schemas.openxmlformats.org/drawingml/2006/main"/>
         </p:blipFill>
         <p:spPr>
           <a:xfrm xmlns:a="http://schemas.openxmlformats.org/drawingml/2006/main">
-            <a:off x="6104712" y="2038350"/>
-            <a:ext cx="5268951" cy="3086100"/>
+            <a:off x="6413697" y="1790700"/>
+            <a:ext cx="4650982" cy="2724150"/>
           </a:xfrm>
           <a:prstGeom xmlns:a="http://schemas.openxmlformats.org/drawingml/2006/main" prst="rect">
             <a:avLst/>
@@ -3535,8 +3799,8 @@
         </p:nvSpPr>
         <p:spPr>
           <a:xfrm xmlns:a="http://schemas.openxmlformats.org/drawingml/2006/main">
-            <a:off x="5838825" y="5324475"/>
-            <a:ext cx="5810250" cy="600075"/>
+            <a:off x="8096250" y="4819650"/>
+            <a:ext cx="3571875" cy="1257300"/>
           </a:xfrm>
           <a:prstGeom xmlns:a="http://schemas.openxmlformats.org/drawingml/2006/main" prst="rect">
             <a:avLst/>
@@ -3553,9 +3817,10 @@
           <a:lstStyle xmlns:a="http://schemas.openxmlformats.org/drawingml/2006/main"/>
           <a:p xmlns:a="http://schemas.openxmlformats.org/drawingml/2006/main">
             <a:pPr>
+              <a:buNone/>
               <a:defRPr sz="1125" b="0">
                 <a:solidFill>
-                  <a:srgbClr val="526571"/>
+                  <a:srgbClr val="18303F"/>
                 </a:solidFill>
                 <a:latin typeface="Arial"/>
                 <a:ea typeface="Arial"/>
@@ -3565,7 +3830,7 @@
             <a:r>
               <a:rPr sz="1125" b="0">
                 <a:solidFill>
-                  <a:srgbClr val="526571"/>
+                  <a:srgbClr val="18303F"/>
                 </a:solidFill>
                 <a:latin typeface="Arial"/>
                 <a:ea typeface="Arial"/>
@@ -3610,6 +3875,7 @@
           <a:lstStyle xmlns:a="http://schemas.openxmlformats.org/drawingml/2006/main"/>
           <a:p xmlns:a="http://schemas.openxmlformats.org/drawingml/2006/main">
             <a:pPr>
+              <a:buNone/>
               <a:defRPr sz="1725" b="1">
                 <a:solidFill>
                   <a:srgbClr val="2F6079"/>
@@ -3629,6 +3895,85 @@
                 <a:cs typeface="Arial"/>
               </a:rPr>
               <a:t>Which measurements would prove that these drawings match?</a:t>
+            </a:r>
+          </a:p>
+        </p:txBody>
+      </p:sp>
+      <p:pic>
+        <p:nvPicPr>
+          <p:cNvPr id="25" name=""/>
+          <p:cNvPicPr>
+            <a:picLocks xmlns:a="http://schemas.openxmlformats.org/drawingml/2006/main" noChangeAspect="1"/>
+          </p:cNvPicPr>
+          <p:nvPr/>
+        </p:nvPicPr>
+        <p:blipFill>
+          <a:blip xmlns:r="http://schemas.openxmlformats.org/officeDocument/2006/relationships" xmlns:a="http://schemas.openxmlformats.org/drawingml/2006/main" r:embed="Re77e6a9129d646bd"/>
+          <a:stretch xmlns:a="http://schemas.openxmlformats.org/drawingml/2006/main"/>
+        </p:blipFill>
+        <p:spPr>
+          <a:xfrm xmlns:a="http://schemas.openxmlformats.org/drawingml/2006/main">
+            <a:off x="5826919" y="4762500"/>
+            <a:ext cx="2014538" cy="1343025"/>
+          </a:xfrm>
+          <a:prstGeom xmlns:a="http://schemas.openxmlformats.org/drawingml/2006/main" prst="rect">
+            <a:avLst/>
+          </a:prstGeom>
+        </p:spPr>
+      </p:pic>
+      <p:sp>
+        <p:nvSpPr>
+          <p:cNvPr id="14" name="">
+            <a:extLst xmlns:a="http://schemas.openxmlformats.org/drawingml/2006/main">
+              <a:ext uri="{FF2B5EF4-FFF2-40B4-BE49-F238E27FC236}">
+                <a16:creationId xmlns:a16="http://schemas.microsoft.com/office/drawing/2014/main" id="{07868E57-1EB0-4D38-9D16-753DBA8513FB}"/>
+              </a:ext>
+            </a:extLst>
+          </p:cNvPr>
+          <p:cNvSpPr>
+            <a:spLocks xmlns:a="http://schemas.openxmlformats.org/drawingml/2006/main" noGrp="1"/>
+          </p:cNvSpPr>
+          <p:nvPr/>
+        </p:nvSpPr>
+        <p:spPr>
+          <a:xfrm xmlns:a="http://schemas.openxmlformats.org/drawingml/2006/main">
+            <a:off x="5810250" y="6115050"/>
+            <a:ext cx="2286000" cy="171450"/>
+          </a:xfrm>
+          <a:prstGeom xmlns:a="http://schemas.openxmlformats.org/drawingml/2006/main" prst="rect">
+            <a:avLst/>
+          </a:prstGeom>
+          <a:noFill xmlns:a="http://schemas.openxmlformats.org/drawingml/2006/main"/>
+          <a:ln xmlns:a="http://schemas.openxmlformats.org/drawingml/2006/main" w="0">
+            <a:noFill/>
+          </a:ln>
+        </p:spPr>
+        <p:txBody>
+          <a:bodyPr xmlns:a="http://schemas.openxmlformats.org/drawingml/2006/main">
+            <a:noAutofit/>
+          </a:bodyPr>
+          <a:lstStyle xmlns:a="http://schemas.openxmlformats.org/drawingml/2006/main"/>
+          <a:p xmlns:a="http://schemas.openxmlformats.org/drawingml/2006/main">
+            <a:pPr>
+              <a:defRPr sz="900">
+                <a:solidFill>
+                  <a:srgbClr val="526571"/>
+                </a:solidFill>
+                <a:latin typeface="Arial"/>
+                <a:ea typeface="Arial"/>
+                <a:cs typeface="Arial"/>
+              </a:defRPr>
+            </a:pPr>
+            <a:r>
+              <a:rPr sz="900">
+                <a:solidFill>
+                  <a:srgbClr val="526571"/>
+                </a:solidFill>
+                <a:latin typeface="Arial"/>
+                <a:ea typeface="Arial"/>
+                <a:cs typeface="Arial"/>
+              </a:rPr>
+              <a:t>AI-generated concept image</a:t>
             </a:r>
           </a:p>
         </p:txBody>
@@ -3726,6 +4071,7 @@
           <a:lstStyle xmlns:a="http://schemas.openxmlformats.org/drawingml/2006/main"/>
           <a:p xmlns:a="http://schemas.openxmlformats.org/drawingml/2006/main">
             <a:pPr>
+              <a:buNone/>
               <a:defRPr sz="1200" b="1">
                 <a:solidFill>
                   <a:srgbClr val="2F6079"/>
@@ -3783,6 +4129,7 @@
           <a:lstStyle xmlns:a="http://schemas.openxmlformats.org/drawingml/2006/main"/>
           <a:p xmlns:a="http://schemas.openxmlformats.org/drawingml/2006/main">
             <a:pPr>
+              <a:buNone/>
               <a:defRPr sz="1050" b="0">
                 <a:solidFill>
                   <a:srgbClr val="526571"/>
@@ -3840,6 +4187,7 @@
           <a:lstStyle xmlns:a="http://schemas.openxmlformats.org/drawingml/2006/main"/>
           <a:p xmlns:a="http://schemas.openxmlformats.org/drawingml/2006/main">
             <a:pPr>
+              <a:buNone/>
               <a:defRPr sz="1125" b="1">
                 <a:solidFill>
                   <a:srgbClr val="2F6079"/>
@@ -3897,6 +4245,7 @@
           <a:lstStyle xmlns:a="http://schemas.openxmlformats.org/drawingml/2006/main"/>
           <a:p xmlns:a="http://schemas.openxmlformats.org/drawingml/2006/main">
             <a:pPr>
+              <a:buNone/>
               <a:defRPr sz="2850" b="1">
                 <a:solidFill>
                   <a:srgbClr val="18303F"/>
@@ -3954,6 +4303,7 @@
           <a:lstStyle xmlns:a="http://schemas.openxmlformats.org/drawingml/2006/main"/>
           <a:p xmlns:a="http://schemas.openxmlformats.org/drawingml/2006/main">
             <a:pPr>
+              <a:buNone/>
               <a:defRPr sz="1875" b="0">
                 <a:solidFill>
                   <a:srgbClr val="18303F"/>
@@ -3982,6 +4332,7 @@
           </a:p>
           <a:p xmlns:a="http://schemas.openxmlformats.org/drawingml/2006/main">
             <a:pPr>
+              <a:buNone/>
               <a:defRPr sz="1875" b="0">
                 <a:solidFill>
                   <a:srgbClr val="18303F"/>
@@ -4021,8 +4372,8 @@
         </p:nvSpPr>
         <p:spPr>
           <a:xfrm xmlns:a="http://schemas.openxmlformats.org/drawingml/2006/main">
-            <a:off x="5810250" y="1962150"/>
-            <a:ext cx="5857875" cy="3238500"/>
+            <a:off x="5810250" y="1714500"/>
+            <a:ext cx="5857875" cy="2876550"/>
           </a:xfrm>
           <a:prstGeom xmlns:a="http://schemas.openxmlformats.org/drawingml/2006/main" prst="rect">
             <a:avLst/>
@@ -4037,20 +4388,21 @@
       </p:sp>
       <p:pic>
         <p:nvPicPr>
-          <p:cNvPr id="18" name=""/>
+          <p:cNvPr id="22" name=""/>
           <p:cNvPicPr>
             <a:picLocks xmlns:a="http://schemas.openxmlformats.org/drawingml/2006/main" noChangeAspect="1"/>
           </p:cNvPicPr>
           <p:nvPr/>
         </p:nvPicPr>
         <p:blipFill>
-          <a:blip xmlns:r="http://schemas.openxmlformats.org/officeDocument/2006/relationships" xmlns:a="http://schemas.openxmlformats.org/drawingml/2006/main" r:embed="Rd3f207fb829649b5"/>
+          <a:blip xmlns:r="http://schemas.openxmlformats.org/officeDocument/2006/relationships" xmlns:a="http://schemas.openxmlformats.org/drawingml/2006/main" r:embed="R273af9a31f1b466a"/>
+          <a:srcRect xmlns:a="http://schemas.openxmlformats.org/drawingml/2006/main" l="0" t="0" r="0" b="0"/>
           <a:stretch xmlns:a="http://schemas.openxmlformats.org/drawingml/2006/main"/>
         </p:blipFill>
         <p:spPr>
           <a:xfrm xmlns:a="http://schemas.openxmlformats.org/drawingml/2006/main">
-            <a:off x="6104712" y="2038350"/>
-            <a:ext cx="5268951" cy="3086100"/>
+            <a:off x="6413697" y="1790700"/>
+            <a:ext cx="4650982" cy="2724150"/>
           </a:xfrm>
           <a:prstGeom xmlns:a="http://schemas.openxmlformats.org/drawingml/2006/main" prst="rect">
             <a:avLst/>
@@ -4073,8 +4425,8 @@
         </p:nvSpPr>
         <p:spPr>
           <a:xfrm xmlns:a="http://schemas.openxmlformats.org/drawingml/2006/main">
-            <a:off x="5838825" y="5324475"/>
-            <a:ext cx="5810250" cy="600075"/>
+            <a:off x="8096250" y="4819650"/>
+            <a:ext cx="3571875" cy="1257300"/>
           </a:xfrm>
           <a:prstGeom xmlns:a="http://schemas.openxmlformats.org/drawingml/2006/main" prst="rect">
             <a:avLst/>
@@ -4091,9 +4443,10 @@
           <a:lstStyle xmlns:a="http://schemas.openxmlformats.org/drawingml/2006/main"/>
           <a:p xmlns:a="http://schemas.openxmlformats.org/drawingml/2006/main">
             <a:pPr>
+              <a:buNone/>
               <a:defRPr sz="1125" b="0">
                 <a:solidFill>
-                  <a:srgbClr val="526571"/>
+                  <a:srgbClr val="18303F"/>
                 </a:solidFill>
                 <a:latin typeface="Arial"/>
                 <a:ea typeface="Arial"/>
@@ -4103,7 +4456,7 @@
             <a:r>
               <a:rPr sz="1125" b="0">
                 <a:solidFill>
-                  <a:srgbClr val="526571"/>
+                  <a:srgbClr val="18303F"/>
                 </a:solidFill>
                 <a:latin typeface="Arial"/>
                 <a:ea typeface="Arial"/>
@@ -4148,6 +4501,7 @@
           <a:lstStyle xmlns:a="http://schemas.openxmlformats.org/drawingml/2006/main"/>
           <a:p xmlns:a="http://schemas.openxmlformats.org/drawingml/2006/main">
             <a:pPr>
+              <a:buNone/>
               <a:defRPr sz="1725" b="1">
                 <a:solidFill>
                   <a:srgbClr val="2F6079"/>
@@ -4167,6 +4521,85 @@
                 <a:cs typeface="Arial"/>
               </a:rPr>
               <a:t>Trace the two profiles without jumping across an endpoint gap.</a:t>
+            </a:r>
+          </a:p>
+        </p:txBody>
+      </p:sp>
+      <p:pic>
+        <p:nvPicPr>
+          <p:cNvPr id="25" name=""/>
+          <p:cNvPicPr>
+            <a:picLocks xmlns:a="http://schemas.openxmlformats.org/drawingml/2006/main" noChangeAspect="1"/>
+          </p:cNvPicPr>
+          <p:nvPr/>
+        </p:nvPicPr>
+        <p:blipFill>
+          <a:blip xmlns:r="http://schemas.openxmlformats.org/officeDocument/2006/relationships" xmlns:a="http://schemas.openxmlformats.org/drawingml/2006/main" r:embed="R624629589baa4dde"/>
+          <a:stretch xmlns:a="http://schemas.openxmlformats.org/drawingml/2006/main"/>
+        </p:blipFill>
+        <p:spPr>
+          <a:xfrm xmlns:a="http://schemas.openxmlformats.org/drawingml/2006/main">
+            <a:off x="5826919" y="4762500"/>
+            <a:ext cx="2014538" cy="1343025"/>
+          </a:xfrm>
+          <a:prstGeom xmlns:a="http://schemas.openxmlformats.org/drawingml/2006/main" prst="rect">
+            <a:avLst/>
+          </a:prstGeom>
+        </p:spPr>
+      </p:pic>
+      <p:sp>
+        <p:nvSpPr>
+          <p:cNvPr id="14" name="">
+            <a:extLst xmlns:a="http://schemas.openxmlformats.org/drawingml/2006/main">
+              <a:ext uri="{FF2B5EF4-FFF2-40B4-BE49-F238E27FC236}">
+                <a16:creationId xmlns:a16="http://schemas.microsoft.com/office/drawing/2014/main" id="{374F9382-5263-4B12-9185-FA1A57257E0F}"/>
+              </a:ext>
+            </a:extLst>
+          </p:cNvPr>
+          <p:cNvSpPr>
+            <a:spLocks xmlns:a="http://schemas.openxmlformats.org/drawingml/2006/main" noGrp="1"/>
+          </p:cNvSpPr>
+          <p:nvPr/>
+        </p:nvSpPr>
+        <p:spPr>
+          <a:xfrm xmlns:a="http://schemas.openxmlformats.org/drawingml/2006/main">
+            <a:off x="5810250" y="6115050"/>
+            <a:ext cx="2286000" cy="171450"/>
+          </a:xfrm>
+          <a:prstGeom xmlns:a="http://schemas.openxmlformats.org/drawingml/2006/main" prst="rect">
+            <a:avLst/>
+          </a:prstGeom>
+          <a:noFill xmlns:a="http://schemas.openxmlformats.org/drawingml/2006/main"/>
+          <a:ln xmlns:a="http://schemas.openxmlformats.org/drawingml/2006/main" w="0">
+            <a:noFill/>
+          </a:ln>
+        </p:spPr>
+        <p:txBody>
+          <a:bodyPr xmlns:a="http://schemas.openxmlformats.org/drawingml/2006/main">
+            <a:noAutofit/>
+          </a:bodyPr>
+          <a:lstStyle xmlns:a="http://schemas.openxmlformats.org/drawingml/2006/main"/>
+          <a:p xmlns:a="http://schemas.openxmlformats.org/drawingml/2006/main">
+            <a:pPr>
+              <a:defRPr sz="900">
+                <a:solidFill>
+                  <a:srgbClr val="526571"/>
+                </a:solidFill>
+                <a:latin typeface="Arial"/>
+                <a:ea typeface="Arial"/>
+                <a:cs typeface="Arial"/>
+              </a:defRPr>
+            </a:pPr>
+            <a:r>
+              <a:rPr sz="900">
+                <a:solidFill>
+                  <a:srgbClr val="526571"/>
+                </a:solidFill>
+                <a:latin typeface="Arial"/>
+                <a:ea typeface="Arial"/>
+                <a:cs typeface="Arial"/>
+              </a:rPr>
+              <a:t>AI-generated concept image</a:t>
             </a:r>
           </a:p>
         </p:txBody>
@@ -4264,6 +4697,7 @@
           <a:lstStyle xmlns:a="http://schemas.openxmlformats.org/drawingml/2006/main"/>
           <a:p xmlns:a="http://schemas.openxmlformats.org/drawingml/2006/main">
             <a:pPr>
+              <a:buNone/>
               <a:defRPr sz="1200" b="1">
                 <a:solidFill>
                   <a:srgbClr val="2F6079"/>
@@ -4321,6 +4755,7 @@
           <a:lstStyle xmlns:a="http://schemas.openxmlformats.org/drawingml/2006/main"/>
           <a:p xmlns:a="http://schemas.openxmlformats.org/drawingml/2006/main">
             <a:pPr>
+              <a:buNone/>
               <a:defRPr sz="1050" b="0">
                 <a:solidFill>
                   <a:srgbClr val="526571"/>
@@ -4378,6 +4813,7 @@
           <a:lstStyle xmlns:a="http://schemas.openxmlformats.org/drawingml/2006/main"/>
           <a:p xmlns:a="http://schemas.openxmlformats.org/drawingml/2006/main">
             <a:pPr>
+              <a:buNone/>
               <a:defRPr sz="1125" b="1">
                 <a:solidFill>
                   <a:srgbClr val="2F6079"/>
@@ -4435,6 +4871,7 @@
           <a:lstStyle xmlns:a="http://schemas.openxmlformats.org/drawingml/2006/main"/>
           <a:p xmlns:a="http://schemas.openxmlformats.org/drawingml/2006/main">
             <a:pPr>
+              <a:buNone/>
               <a:defRPr sz="2850" b="1">
                 <a:solidFill>
                   <a:srgbClr val="18303F"/>
@@ -4492,6 +4929,7 @@
           <a:lstStyle xmlns:a="http://schemas.openxmlformats.org/drawingml/2006/main"/>
           <a:p xmlns:a="http://schemas.openxmlformats.org/drawingml/2006/main">
             <a:pPr>
+              <a:buNone/>
               <a:defRPr sz="1875" b="0">
                 <a:solidFill>
                   <a:srgbClr val="18303F"/>
@@ -4520,6 +4958,7 @@
           </a:p>
           <a:p xmlns:a="http://schemas.openxmlformats.org/drawingml/2006/main">
             <a:pPr>
+              <a:buNone/>
               <a:defRPr sz="1875" b="0">
                 <a:solidFill>
                   <a:srgbClr val="18303F"/>
@@ -4559,8 +4998,8 @@
         </p:nvSpPr>
         <p:spPr>
           <a:xfrm xmlns:a="http://schemas.openxmlformats.org/drawingml/2006/main">
-            <a:off x="5810250" y="1962150"/>
-            <a:ext cx="5857875" cy="3238500"/>
+            <a:off x="5810250" y="1714500"/>
+            <a:ext cx="5857875" cy="2876550"/>
           </a:xfrm>
           <a:prstGeom xmlns:a="http://schemas.openxmlformats.org/drawingml/2006/main" prst="rect">
             <a:avLst/>
@@ -4575,20 +5014,21 @@
       </p:sp>
       <p:pic>
         <p:nvPicPr>
-          <p:cNvPr id="18" name=""/>
+          <p:cNvPr id="22" name=""/>
           <p:cNvPicPr>
             <a:picLocks xmlns:a="http://schemas.openxmlformats.org/drawingml/2006/main" noChangeAspect="1"/>
           </p:cNvPicPr>
           <p:nvPr/>
         </p:nvPicPr>
         <p:blipFill>
-          <a:blip xmlns:r="http://schemas.openxmlformats.org/officeDocument/2006/relationships" xmlns:a="http://schemas.openxmlformats.org/drawingml/2006/main" r:embed="R586a91f27dc945b0"/>
+          <a:blip xmlns:r="http://schemas.openxmlformats.org/officeDocument/2006/relationships" xmlns:a="http://schemas.openxmlformats.org/drawingml/2006/main" r:embed="Rb1ab1a8504674e97"/>
+          <a:srcRect xmlns:a="http://schemas.openxmlformats.org/drawingml/2006/main" l="0" t="0" r="0" b="0"/>
           <a:stretch xmlns:a="http://schemas.openxmlformats.org/drawingml/2006/main"/>
         </p:blipFill>
         <p:spPr>
           <a:xfrm xmlns:a="http://schemas.openxmlformats.org/drawingml/2006/main">
-            <a:off x="6104712" y="2038350"/>
-            <a:ext cx="5268951" cy="3086100"/>
+            <a:off x="6413697" y="1790700"/>
+            <a:ext cx="4650982" cy="2724150"/>
           </a:xfrm>
           <a:prstGeom xmlns:a="http://schemas.openxmlformats.org/drawingml/2006/main" prst="rect">
             <a:avLst/>
@@ -4611,8 +5051,8 @@
         </p:nvSpPr>
         <p:spPr>
           <a:xfrm xmlns:a="http://schemas.openxmlformats.org/drawingml/2006/main">
-            <a:off x="5838825" y="5324475"/>
-            <a:ext cx="5810250" cy="600075"/>
+            <a:off x="8096250" y="4819650"/>
+            <a:ext cx="3571875" cy="1257300"/>
           </a:xfrm>
           <a:prstGeom xmlns:a="http://schemas.openxmlformats.org/drawingml/2006/main" prst="rect">
             <a:avLst/>
@@ -4629,9 +5069,10 @@
           <a:lstStyle xmlns:a="http://schemas.openxmlformats.org/drawingml/2006/main"/>
           <a:p xmlns:a="http://schemas.openxmlformats.org/drawingml/2006/main">
             <a:pPr>
+              <a:buNone/>
               <a:defRPr sz="1125" b="0">
                 <a:solidFill>
-                  <a:srgbClr val="526571"/>
+                  <a:srgbClr val="18303F"/>
                 </a:solidFill>
                 <a:latin typeface="Arial"/>
                 <a:ea typeface="Arial"/>
@@ -4641,7 +5082,7 @@
             <a:r>
               <a:rPr sz="1125" b="0">
                 <a:solidFill>
-                  <a:srgbClr val="526571"/>
+                  <a:srgbClr val="18303F"/>
                 </a:solidFill>
                 <a:latin typeface="Arial"/>
                 <a:ea typeface="Arial"/>
@@ -4686,6 +5127,7 @@
           <a:lstStyle xmlns:a="http://schemas.openxmlformats.org/drawingml/2006/main"/>
           <a:p xmlns:a="http://schemas.openxmlformats.org/drawingml/2006/main">
             <a:pPr>
+              <a:buNone/>
               <a:defRPr sz="1725" b="1">
                 <a:solidFill>
                   <a:srgbClr val="2F6079"/>
@@ -4705,6 +5147,85 @@
                 <a:cs typeface="Arial"/>
               </a:rPr>
               <a:t>Follow a solid path from each centre to the surrounding plate.</a:t>
+            </a:r>
+          </a:p>
+        </p:txBody>
+      </p:sp>
+      <p:pic>
+        <p:nvPicPr>
+          <p:cNvPr id="25" name=""/>
+          <p:cNvPicPr>
+            <a:picLocks xmlns:a="http://schemas.openxmlformats.org/drawingml/2006/main" noChangeAspect="1"/>
+          </p:cNvPicPr>
+          <p:nvPr/>
+        </p:nvPicPr>
+        <p:blipFill>
+          <a:blip xmlns:r="http://schemas.openxmlformats.org/officeDocument/2006/relationships" xmlns:a="http://schemas.openxmlformats.org/drawingml/2006/main" r:embed="R19e658c1ecdf4770"/>
+          <a:stretch xmlns:a="http://schemas.openxmlformats.org/drawingml/2006/main"/>
+        </p:blipFill>
+        <p:spPr>
+          <a:xfrm xmlns:a="http://schemas.openxmlformats.org/drawingml/2006/main">
+            <a:off x="5826919" y="4762500"/>
+            <a:ext cx="2014538" cy="1343025"/>
+          </a:xfrm>
+          <a:prstGeom xmlns:a="http://schemas.openxmlformats.org/drawingml/2006/main" prst="rect">
+            <a:avLst/>
+          </a:prstGeom>
+        </p:spPr>
+      </p:pic>
+      <p:sp>
+        <p:nvSpPr>
+          <p:cNvPr id="14" name="">
+            <a:extLst xmlns:a="http://schemas.openxmlformats.org/drawingml/2006/main">
+              <a:ext uri="{FF2B5EF4-FFF2-40B4-BE49-F238E27FC236}">
+                <a16:creationId xmlns:a16="http://schemas.microsoft.com/office/drawing/2014/main" id="{5D898B1F-8E30-4FBA-A0AE-5A86B51154B2}"/>
+              </a:ext>
+            </a:extLst>
+          </p:cNvPr>
+          <p:cNvSpPr>
+            <a:spLocks xmlns:a="http://schemas.openxmlformats.org/drawingml/2006/main" noGrp="1"/>
+          </p:cNvSpPr>
+          <p:nvPr/>
+        </p:nvSpPr>
+        <p:spPr>
+          <a:xfrm xmlns:a="http://schemas.openxmlformats.org/drawingml/2006/main">
+            <a:off x="5810250" y="6115050"/>
+            <a:ext cx="2286000" cy="171450"/>
+          </a:xfrm>
+          <a:prstGeom xmlns:a="http://schemas.openxmlformats.org/drawingml/2006/main" prst="rect">
+            <a:avLst/>
+          </a:prstGeom>
+          <a:noFill xmlns:a="http://schemas.openxmlformats.org/drawingml/2006/main"/>
+          <a:ln xmlns:a="http://schemas.openxmlformats.org/drawingml/2006/main" w="0">
+            <a:noFill/>
+          </a:ln>
+        </p:spPr>
+        <p:txBody>
+          <a:bodyPr xmlns:a="http://schemas.openxmlformats.org/drawingml/2006/main">
+            <a:noAutofit/>
+          </a:bodyPr>
+          <a:lstStyle xmlns:a="http://schemas.openxmlformats.org/drawingml/2006/main"/>
+          <a:p xmlns:a="http://schemas.openxmlformats.org/drawingml/2006/main">
+            <a:pPr>
+              <a:defRPr sz="900">
+                <a:solidFill>
+                  <a:srgbClr val="526571"/>
+                </a:solidFill>
+                <a:latin typeface="Arial"/>
+                <a:ea typeface="Arial"/>
+                <a:cs typeface="Arial"/>
+              </a:defRPr>
+            </a:pPr>
+            <a:r>
+              <a:rPr sz="900">
+                <a:solidFill>
+                  <a:srgbClr val="526571"/>
+                </a:solidFill>
+                <a:latin typeface="Arial"/>
+                <a:ea typeface="Arial"/>
+                <a:cs typeface="Arial"/>
+              </a:rPr>
+              <a:t>AI-generated concept image</a:t>
             </a:r>
           </a:p>
         </p:txBody>
@@ -4802,6 +5323,7 @@
           <a:lstStyle xmlns:a="http://schemas.openxmlformats.org/drawingml/2006/main"/>
           <a:p xmlns:a="http://schemas.openxmlformats.org/drawingml/2006/main">
             <a:pPr>
+              <a:buNone/>
               <a:defRPr sz="1200" b="1">
                 <a:solidFill>
                   <a:srgbClr val="2F6079"/>
@@ -4859,6 +5381,7 @@
           <a:lstStyle xmlns:a="http://schemas.openxmlformats.org/drawingml/2006/main"/>
           <a:p xmlns:a="http://schemas.openxmlformats.org/drawingml/2006/main">
             <a:pPr>
+              <a:buNone/>
               <a:defRPr sz="1050" b="0">
                 <a:solidFill>
                   <a:srgbClr val="526571"/>
@@ -4916,6 +5439,7 @@
           <a:lstStyle xmlns:a="http://schemas.openxmlformats.org/drawingml/2006/main"/>
           <a:p xmlns:a="http://schemas.openxmlformats.org/drawingml/2006/main">
             <a:pPr>
+              <a:buNone/>
               <a:defRPr sz="1125" b="1">
                 <a:solidFill>
                   <a:srgbClr val="2F6079"/>
@@ -4973,6 +5497,7 @@
           <a:lstStyle xmlns:a="http://schemas.openxmlformats.org/drawingml/2006/main"/>
           <a:p xmlns:a="http://schemas.openxmlformats.org/drawingml/2006/main">
             <a:pPr>
+              <a:buNone/>
               <a:defRPr sz="3225" b="1">
                 <a:solidFill>
                   <a:srgbClr val="18303F"/>
@@ -5030,6 +5555,7 @@
           <a:lstStyle xmlns:a="http://schemas.openxmlformats.org/drawingml/2006/main"/>
           <a:p xmlns:a="http://schemas.openxmlformats.org/drawingml/2006/main">
             <a:pPr>
+              <a:buNone/>
               <a:defRPr sz="2400" b="1">
                 <a:solidFill>
                   <a:srgbClr val="2F6079"/>
@@ -5070,7 +5596,7 @@
         <p:spPr>
           <a:xfrm xmlns:a="http://schemas.openxmlformats.org/drawingml/2006/main">
             <a:off x="1352550" y="2124075"/>
-            <a:ext cx="10096500" cy="914400"/>
+            <a:ext cx="5619750" cy="1143000"/>
           </a:xfrm>
           <a:prstGeom xmlns:a="http://schemas.openxmlformats.org/drawingml/2006/main" prst="rect">
             <a:avLst/>
@@ -5087,7 +5613,8 @@
           <a:lstStyle xmlns:a="http://schemas.openxmlformats.org/drawingml/2006/main"/>
           <a:p xmlns:a="http://schemas.openxmlformats.org/drawingml/2006/main">
             <a:pPr>
-              <a:defRPr sz="2100" b="0">
+              <a:buNone/>
+              <a:defRPr sz="2025" b="0">
                 <a:solidFill>
                   <a:srgbClr val="18303F"/>
                 </a:solidFill>
@@ -5097,7 +5624,7 @@
               </a:defRPr>
             </a:pPr>
             <a:r>
-              <a:rPr sz="2100" b="0">
+              <a:rPr sz="2025" b="0">
                 <a:solidFill>
                   <a:srgbClr val="18303F"/>
                 </a:solidFill>
@@ -5144,6 +5671,7 @@
           <a:lstStyle xmlns:a="http://schemas.openxmlformats.org/drawingml/2006/main"/>
           <a:p xmlns:a="http://schemas.openxmlformats.org/drawingml/2006/main">
             <a:pPr>
+              <a:buNone/>
               <a:defRPr sz="2400" b="1">
                 <a:solidFill>
                   <a:srgbClr val="2F6079"/>
@@ -5184,7 +5712,7 @@
         <p:spPr>
           <a:xfrm xmlns:a="http://schemas.openxmlformats.org/drawingml/2006/main">
             <a:off x="1352550" y="3276600"/>
-            <a:ext cx="10096500" cy="914400"/>
+            <a:ext cx="5619750" cy="1143000"/>
           </a:xfrm>
           <a:prstGeom xmlns:a="http://schemas.openxmlformats.org/drawingml/2006/main" prst="rect">
             <a:avLst/>
@@ -5201,7 +5729,8 @@
           <a:lstStyle xmlns:a="http://schemas.openxmlformats.org/drawingml/2006/main"/>
           <a:p xmlns:a="http://schemas.openxmlformats.org/drawingml/2006/main">
             <a:pPr>
-              <a:defRPr sz="2100" b="0">
+              <a:buNone/>
+              <a:defRPr sz="2025" b="0">
                 <a:solidFill>
                   <a:srgbClr val="18303F"/>
                 </a:solidFill>
@@ -5211,7 +5740,7 @@
               </a:defRPr>
             </a:pPr>
             <a:r>
-              <a:rPr sz="2100" b="0">
+              <a:rPr sz="2025" b="0">
                 <a:solidFill>
                   <a:srgbClr val="18303F"/>
                 </a:solidFill>
@@ -5258,6 +5787,7 @@
           <a:lstStyle xmlns:a="http://schemas.openxmlformats.org/drawingml/2006/main"/>
           <a:p xmlns:a="http://schemas.openxmlformats.org/drawingml/2006/main">
             <a:pPr>
+              <a:buNone/>
               <a:defRPr sz="2400" b="1">
                 <a:solidFill>
                   <a:srgbClr val="2F6079"/>
@@ -5298,7 +5828,7 @@
         <p:spPr>
           <a:xfrm xmlns:a="http://schemas.openxmlformats.org/drawingml/2006/main">
             <a:off x="1352550" y="4429125"/>
-            <a:ext cx="10096500" cy="914400"/>
+            <a:ext cx="5619750" cy="1143000"/>
           </a:xfrm>
           <a:prstGeom xmlns:a="http://schemas.openxmlformats.org/drawingml/2006/main" prst="rect">
             <a:avLst/>
@@ -5315,7 +5845,8 @@
           <a:lstStyle xmlns:a="http://schemas.openxmlformats.org/drawingml/2006/main"/>
           <a:p xmlns:a="http://schemas.openxmlformats.org/drawingml/2006/main">
             <a:pPr>
-              <a:defRPr sz="2100" b="0">
+              <a:buNone/>
+              <a:defRPr sz="2025" b="0">
                 <a:solidFill>
                   <a:srgbClr val="18303F"/>
                 </a:solidFill>
@@ -5325,7 +5856,7 @@
               </a:defRPr>
             </a:pPr>
             <a:r>
-              <a:rPr sz="2100" b="0">
+              <a:rPr sz="2025" b="0">
                 <a:solidFill>
                   <a:srgbClr val="18303F"/>
                 </a:solidFill>
@@ -5334,6 +5865,85 @@
                 <a:cs typeface="Arial"/>
               </a:rPr>
               <a:t>Follow a solid path from each centre to the surrounding plate.</a:t>
+            </a:r>
+          </a:p>
+        </p:txBody>
+      </p:sp>
+      <p:pic>
+        <p:nvPicPr>
+          <p:cNvPr id="26" name=""/>
+          <p:cNvPicPr>
+            <a:picLocks xmlns:a="http://schemas.openxmlformats.org/drawingml/2006/main" noChangeAspect="1"/>
+          </p:cNvPicPr>
+          <p:nvPr/>
+        </p:nvPicPr>
+        <p:blipFill>
+          <a:blip xmlns:r="http://schemas.openxmlformats.org/officeDocument/2006/relationships" xmlns:a="http://schemas.openxmlformats.org/drawingml/2006/main" r:embed="R644d2569da524a32"/>
+          <a:stretch xmlns:a="http://schemas.openxmlformats.org/drawingml/2006/main"/>
+        </p:blipFill>
+        <p:spPr>
+          <a:xfrm xmlns:a="http://schemas.openxmlformats.org/drawingml/2006/main">
+            <a:off x="7620000" y="2484438"/>
+            <a:ext cx="4048125" cy="2698750"/>
+          </a:xfrm>
+          <a:prstGeom xmlns:a="http://schemas.openxmlformats.org/drawingml/2006/main" prst="rect">
+            <a:avLst/>
+          </a:prstGeom>
+        </p:spPr>
+      </p:pic>
+      <p:sp>
+        <p:nvSpPr>
+          <p:cNvPr id="14" name="">
+            <a:extLst xmlns:a="http://schemas.openxmlformats.org/drawingml/2006/main">
+              <a:ext uri="{FF2B5EF4-FFF2-40B4-BE49-F238E27FC236}">
+                <a16:creationId xmlns:a16="http://schemas.microsoft.com/office/drawing/2014/main" id="{5C3A7721-4EE3-44C1-8D16-9D6C6F702CF0}"/>
+              </a:ext>
+            </a:extLst>
+          </p:cNvPr>
+          <p:cNvSpPr>
+            <a:spLocks xmlns:a="http://schemas.openxmlformats.org/drawingml/2006/main" noGrp="1"/>
+          </p:cNvSpPr>
+          <p:nvPr/>
+        </p:nvSpPr>
+        <p:spPr>
+          <a:xfrm xmlns:a="http://schemas.openxmlformats.org/drawingml/2006/main">
+            <a:off x="7620000" y="5734050"/>
+            <a:ext cx="4048125" cy="171450"/>
+          </a:xfrm>
+          <a:prstGeom xmlns:a="http://schemas.openxmlformats.org/drawingml/2006/main" prst="rect">
+            <a:avLst/>
+          </a:prstGeom>
+          <a:noFill xmlns:a="http://schemas.openxmlformats.org/drawingml/2006/main"/>
+          <a:ln xmlns:a="http://schemas.openxmlformats.org/drawingml/2006/main" w="0">
+            <a:noFill/>
+          </a:ln>
+        </p:spPr>
+        <p:txBody>
+          <a:bodyPr xmlns:a="http://schemas.openxmlformats.org/drawingml/2006/main">
+            <a:noAutofit/>
+          </a:bodyPr>
+          <a:lstStyle xmlns:a="http://schemas.openxmlformats.org/drawingml/2006/main"/>
+          <a:p xmlns:a="http://schemas.openxmlformats.org/drawingml/2006/main">
+            <a:pPr>
+              <a:defRPr sz="900">
+                <a:solidFill>
+                  <a:srgbClr val="526571"/>
+                </a:solidFill>
+                <a:latin typeface="Arial"/>
+                <a:ea typeface="Arial"/>
+                <a:cs typeface="Arial"/>
+              </a:defRPr>
+            </a:pPr>
+            <a:r>
+              <a:rPr sz="900">
+                <a:solidFill>
+                  <a:srgbClr val="526571"/>
+                </a:solidFill>
+                <a:latin typeface="Arial"/>
+                <a:ea typeface="Arial"/>
+                <a:cs typeface="Arial"/>
+              </a:rPr>
+              <a:t>AI-generated concept image</a:t>
             </a:r>
           </a:p>
         </p:txBody>
@@ -5431,6 +6041,7 @@
           <a:lstStyle xmlns:a="http://schemas.openxmlformats.org/drawingml/2006/main"/>
           <a:p xmlns:a="http://schemas.openxmlformats.org/drawingml/2006/main">
             <a:pPr>
+              <a:buNone/>
               <a:defRPr sz="1200" b="1">
                 <a:solidFill>
                   <a:srgbClr val="2F6079"/>
@@ -5488,6 +6099,7 @@
           <a:lstStyle xmlns:a="http://schemas.openxmlformats.org/drawingml/2006/main"/>
           <a:p xmlns:a="http://schemas.openxmlformats.org/drawingml/2006/main">
             <a:pPr>
+              <a:buNone/>
               <a:defRPr sz="1050" b="0">
                 <a:solidFill>
                   <a:srgbClr val="526571"/>
@@ -5545,6 +6157,7 @@
           <a:lstStyle xmlns:a="http://schemas.openxmlformats.org/drawingml/2006/main"/>
           <a:p xmlns:a="http://schemas.openxmlformats.org/drawingml/2006/main">
             <a:pPr>
+              <a:buNone/>
               <a:defRPr sz="1125" b="1">
                 <a:solidFill>
                   <a:srgbClr val="2F6079"/>
@@ -5602,6 +6215,7 @@
           <a:lstStyle xmlns:a="http://schemas.openxmlformats.org/drawingml/2006/main"/>
           <a:p xmlns:a="http://schemas.openxmlformats.org/drawingml/2006/main">
             <a:pPr>
+              <a:buNone/>
               <a:defRPr sz="2925" b="1">
                 <a:solidFill>
                   <a:srgbClr val="18303F"/>
@@ -5641,8 +6255,8 @@
         </p:nvSpPr>
         <p:spPr>
           <a:xfrm xmlns:a="http://schemas.openxmlformats.org/drawingml/2006/main">
-            <a:off x="514350" y="1962150"/>
-            <a:ext cx="11049000" cy="1181100"/>
+            <a:off x="514350" y="1809750"/>
+            <a:ext cx="11049000" cy="1409700"/>
           </a:xfrm>
           <a:prstGeom xmlns:a="http://schemas.openxmlformats.org/drawingml/2006/main" prst="rect">
             <a:avLst/>
@@ -5659,6 +6273,7 @@
           <a:lstStyle xmlns:a="http://schemas.openxmlformats.org/drawingml/2006/main"/>
           <a:p xmlns:a="http://schemas.openxmlformats.org/drawingml/2006/main">
             <a:pPr>
+              <a:buNone/>
               <a:defRPr sz="2025" b="1">
                 <a:solidFill>
                   <a:srgbClr val="18303F"/>
@@ -5698,8 +6313,8 @@
         </p:nvSpPr>
         <p:spPr>
           <a:xfrm xmlns:a="http://schemas.openxmlformats.org/drawingml/2006/main">
-            <a:off x="514350" y="3476625"/>
-            <a:ext cx="742950" cy="495300"/>
+            <a:off x="514350" y="3333750"/>
+            <a:ext cx="742950" cy="666750"/>
           </a:xfrm>
           <a:prstGeom xmlns:a="http://schemas.openxmlformats.org/drawingml/2006/main" prst="rect">
             <a:avLst/>
@@ -5716,6 +6331,7 @@
           <a:lstStyle xmlns:a="http://schemas.openxmlformats.org/drawingml/2006/main"/>
           <a:p xmlns:a="http://schemas.openxmlformats.org/drawingml/2006/main">
             <a:pPr>
+              <a:buNone/>
               <a:defRPr sz="2250" b="1">
                 <a:solidFill>
                   <a:srgbClr val="2F6079"/>
@@ -5755,8 +6371,8 @@
         </p:nvSpPr>
         <p:spPr>
           <a:xfrm xmlns:a="http://schemas.openxmlformats.org/drawingml/2006/main">
-            <a:off x="1485900" y="3476625"/>
-            <a:ext cx="10001250" cy="714375"/>
+            <a:off x="1485900" y="3333750"/>
+            <a:ext cx="6191250" cy="895350"/>
           </a:xfrm>
           <a:prstGeom xmlns:a="http://schemas.openxmlformats.org/drawingml/2006/main" prst="rect">
             <a:avLst/>
@@ -5773,6 +6389,7 @@
           <a:lstStyle xmlns:a="http://schemas.openxmlformats.org/drawingml/2006/main"/>
           <a:p xmlns:a="http://schemas.openxmlformats.org/drawingml/2006/main">
             <a:pPr>
+              <a:buNone/>
               <a:defRPr sz="1800" b="0">
                 <a:solidFill>
                   <a:srgbClr val="18303F"/>
@@ -5812,8 +6429,8 @@
         </p:nvSpPr>
         <p:spPr>
           <a:xfrm xmlns:a="http://schemas.openxmlformats.org/drawingml/2006/main">
-            <a:off x="514350" y="4295775"/>
-            <a:ext cx="742950" cy="495300"/>
+            <a:off x="514350" y="4305300"/>
+            <a:ext cx="742950" cy="666750"/>
           </a:xfrm>
           <a:prstGeom xmlns:a="http://schemas.openxmlformats.org/drawingml/2006/main" prst="rect">
             <a:avLst/>
@@ -5830,6 +6447,7 @@
           <a:lstStyle xmlns:a="http://schemas.openxmlformats.org/drawingml/2006/main"/>
           <a:p xmlns:a="http://schemas.openxmlformats.org/drawingml/2006/main">
             <a:pPr>
+              <a:buNone/>
               <a:defRPr sz="2250" b="1">
                 <a:solidFill>
                   <a:srgbClr val="2F6079"/>
@@ -5869,8 +6487,8 @@
         </p:nvSpPr>
         <p:spPr>
           <a:xfrm xmlns:a="http://schemas.openxmlformats.org/drawingml/2006/main">
-            <a:off x="1485900" y="4295775"/>
-            <a:ext cx="10001250" cy="714375"/>
+            <a:off x="1485900" y="4305300"/>
+            <a:ext cx="6191250" cy="895350"/>
           </a:xfrm>
           <a:prstGeom xmlns:a="http://schemas.openxmlformats.org/drawingml/2006/main" prst="rect">
             <a:avLst/>
@@ -5887,6 +6505,7 @@
           <a:lstStyle xmlns:a="http://schemas.openxmlformats.org/drawingml/2006/main"/>
           <a:p xmlns:a="http://schemas.openxmlformats.org/drawingml/2006/main">
             <a:pPr>
+              <a:buNone/>
               <a:defRPr sz="1800" b="0">
                 <a:solidFill>
                   <a:srgbClr val="18303F"/>
@@ -5926,8 +6545,8 @@
         </p:nvSpPr>
         <p:spPr>
           <a:xfrm xmlns:a="http://schemas.openxmlformats.org/drawingml/2006/main">
-            <a:off x="514350" y="5114925"/>
-            <a:ext cx="742950" cy="495300"/>
+            <a:off x="514350" y="5276850"/>
+            <a:ext cx="742950" cy="666750"/>
           </a:xfrm>
           <a:prstGeom xmlns:a="http://schemas.openxmlformats.org/drawingml/2006/main" prst="rect">
             <a:avLst/>
@@ -5944,6 +6563,7 @@
           <a:lstStyle xmlns:a="http://schemas.openxmlformats.org/drawingml/2006/main"/>
           <a:p xmlns:a="http://schemas.openxmlformats.org/drawingml/2006/main">
             <a:pPr>
+              <a:buNone/>
               <a:defRPr sz="2250" b="1">
                 <a:solidFill>
                   <a:srgbClr val="2F6079"/>
@@ -5983,8 +6603,8 @@
         </p:nvSpPr>
         <p:spPr>
           <a:xfrm xmlns:a="http://schemas.openxmlformats.org/drawingml/2006/main">
-            <a:off x="1485900" y="5114925"/>
-            <a:ext cx="10001250" cy="714375"/>
+            <a:off x="1485900" y="5276850"/>
+            <a:ext cx="6191250" cy="895350"/>
           </a:xfrm>
           <a:prstGeom xmlns:a="http://schemas.openxmlformats.org/drawingml/2006/main" prst="rect">
             <a:avLst/>
@@ -6001,6 +6621,7 @@
           <a:lstStyle xmlns:a="http://schemas.openxmlformats.org/drawingml/2006/main"/>
           <a:p xmlns:a="http://schemas.openxmlformats.org/drawingml/2006/main">
             <a:pPr>
+              <a:buNone/>
               <a:defRPr sz="1800" b="0">
                 <a:solidFill>
                   <a:srgbClr val="18303F"/>
@@ -6020,6 +6641,85 @@
                 <a:cs typeface="Arial"/>
               </a:rPr>
               <a:t>Explain one revision and the evidence needed to judge it.</a:t>
+            </a:r>
+          </a:p>
+        </p:txBody>
+      </p:sp>
+      <p:pic>
+        <p:nvPicPr>
+          <p:cNvPr id="28" name=""/>
+          <p:cNvPicPr>
+            <a:picLocks xmlns:a="http://schemas.openxmlformats.org/drawingml/2006/main" noChangeAspect="1"/>
+          </p:cNvPicPr>
+          <p:nvPr/>
+        </p:nvPicPr>
+        <p:blipFill>
+          <a:blip xmlns:r="http://schemas.openxmlformats.org/officeDocument/2006/relationships" xmlns:a="http://schemas.openxmlformats.org/drawingml/2006/main" r:embed="R98ff7c2977c649aa"/>
+          <a:stretch xmlns:a="http://schemas.openxmlformats.org/drawingml/2006/main"/>
+        </p:blipFill>
+        <p:spPr>
+          <a:xfrm xmlns:a="http://schemas.openxmlformats.org/drawingml/2006/main">
+            <a:off x="7858125" y="3406775"/>
+            <a:ext cx="3810000" cy="2540000"/>
+          </a:xfrm>
+          <a:prstGeom xmlns:a="http://schemas.openxmlformats.org/drawingml/2006/main" prst="rect">
+            <a:avLst/>
+          </a:prstGeom>
+        </p:spPr>
+      </p:pic>
+      <p:sp>
+        <p:nvSpPr>
+          <p:cNvPr id="15" name="">
+            <a:extLst xmlns:a="http://schemas.openxmlformats.org/drawingml/2006/main">
+              <a:ext uri="{FF2B5EF4-FFF2-40B4-BE49-F238E27FC236}">
+                <a16:creationId xmlns:a16="http://schemas.microsoft.com/office/drawing/2014/main" id="{E45CD1E2-2B92-4A82-8838-63376E65F75D}"/>
+              </a:ext>
+            </a:extLst>
+          </p:cNvPr>
+          <p:cNvSpPr>
+            <a:spLocks xmlns:a="http://schemas.openxmlformats.org/drawingml/2006/main" noGrp="1"/>
+          </p:cNvSpPr>
+          <p:nvPr/>
+        </p:nvSpPr>
+        <p:spPr>
+          <a:xfrm xmlns:a="http://schemas.openxmlformats.org/drawingml/2006/main">
+            <a:off x="7858125" y="6067425"/>
+            <a:ext cx="3810000" cy="171450"/>
+          </a:xfrm>
+          <a:prstGeom xmlns:a="http://schemas.openxmlformats.org/drawingml/2006/main" prst="rect">
+            <a:avLst/>
+          </a:prstGeom>
+          <a:noFill xmlns:a="http://schemas.openxmlformats.org/drawingml/2006/main"/>
+          <a:ln xmlns:a="http://schemas.openxmlformats.org/drawingml/2006/main" w="0">
+            <a:noFill/>
+          </a:ln>
+        </p:spPr>
+        <p:txBody>
+          <a:bodyPr xmlns:a="http://schemas.openxmlformats.org/drawingml/2006/main">
+            <a:noAutofit/>
+          </a:bodyPr>
+          <a:lstStyle xmlns:a="http://schemas.openxmlformats.org/drawingml/2006/main"/>
+          <a:p xmlns:a="http://schemas.openxmlformats.org/drawingml/2006/main">
+            <a:pPr>
+              <a:defRPr sz="900">
+                <a:solidFill>
+                  <a:srgbClr val="526571"/>
+                </a:solidFill>
+                <a:latin typeface="Arial"/>
+                <a:ea typeface="Arial"/>
+                <a:cs typeface="Arial"/>
+              </a:defRPr>
+            </a:pPr>
+            <a:r>
+              <a:rPr sz="900">
+                <a:solidFill>
+                  <a:srgbClr val="526571"/>
+                </a:solidFill>
+                <a:latin typeface="Arial"/>
+                <a:ea typeface="Arial"/>
+                <a:cs typeface="Arial"/>
+              </a:rPr>
+              <a:t>AI-generated concept image</a:t>
             </a:r>
           </a:p>
         </p:txBody>
@@ -6117,6 +6817,7 @@
           <a:lstStyle xmlns:a="http://schemas.openxmlformats.org/drawingml/2006/main"/>
           <a:p xmlns:a="http://schemas.openxmlformats.org/drawingml/2006/main">
             <a:pPr>
+              <a:buNone/>
               <a:defRPr sz="1200" b="1">
                 <a:solidFill>
                   <a:srgbClr val="2F6079"/>
@@ -6174,6 +6875,7 @@
           <a:lstStyle xmlns:a="http://schemas.openxmlformats.org/drawingml/2006/main"/>
           <a:p xmlns:a="http://schemas.openxmlformats.org/drawingml/2006/main">
             <a:pPr>
+              <a:buNone/>
               <a:defRPr sz="1050" b="0">
                 <a:solidFill>
                   <a:srgbClr val="526571"/>
@@ -6231,6 +6933,7 @@
           <a:lstStyle xmlns:a="http://schemas.openxmlformats.org/drawingml/2006/main"/>
           <a:p xmlns:a="http://schemas.openxmlformats.org/drawingml/2006/main">
             <a:pPr>
+              <a:buNone/>
               <a:defRPr sz="1125" b="1">
                 <a:solidFill>
                   <a:srgbClr val="2F6079"/>
@@ -6288,6 +6991,7 @@
           <a:lstStyle xmlns:a="http://schemas.openxmlformats.org/drawingml/2006/main"/>
           <a:p xmlns:a="http://schemas.openxmlformats.org/drawingml/2006/main">
             <a:pPr>
+              <a:buNone/>
               <a:defRPr sz="3225" b="1">
                 <a:solidFill>
                   <a:srgbClr val="18303F"/>
@@ -6328,7 +7032,7 @@
         <p:spPr>
           <a:xfrm xmlns:a="http://schemas.openxmlformats.org/drawingml/2006/main">
             <a:off x="514350" y="2038350"/>
-            <a:ext cx="10953750" cy="2190750"/>
+            <a:ext cx="7524750" cy="2571750"/>
           </a:xfrm>
           <a:prstGeom xmlns:a="http://schemas.openxmlformats.org/drawingml/2006/main" prst="rect">
             <a:avLst/>
@@ -6357,8 +7061,8 @@
         </p:nvSpPr>
         <p:spPr>
           <a:xfrm xmlns:a="http://schemas.openxmlformats.org/drawingml/2006/main">
-            <a:off x="800100" y="2314575"/>
-            <a:ext cx="10334625" cy="1647825"/>
+            <a:off x="800100" y="2247900"/>
+            <a:ext cx="6953250" cy="2238375"/>
           </a:xfrm>
           <a:prstGeom xmlns:a="http://schemas.openxmlformats.org/drawingml/2006/main" prst="rect">
             <a:avLst/>
@@ -6375,7 +7079,8 @@
           <a:lstStyle xmlns:a="http://schemas.openxmlformats.org/drawingml/2006/main"/>
           <a:p xmlns:a="http://schemas.openxmlformats.org/drawingml/2006/main">
             <a:pPr>
-              <a:defRPr sz="2325" b="1">
+              <a:buNone/>
+              <a:defRPr sz="2100" b="1">
                 <a:solidFill>
                   <a:srgbClr val="18303F"/>
                 </a:solidFill>
@@ -6385,7 +7090,7 @@
               </a:defRPr>
             </a:pPr>
             <a:r>
-              <a:rPr sz="2325" b="1">
+              <a:rPr sz="2100" b="1">
                 <a:solidFill>
                   <a:srgbClr val="18303F"/>
                 </a:solidFill>
@@ -6398,7 +7103,8 @@
           </a:p>
           <a:p xmlns:a="http://schemas.openxmlformats.org/drawingml/2006/main">
             <a:pPr>
-              <a:defRPr sz="2325" b="1">
+              <a:buNone/>
+              <a:defRPr sz="2100" b="1">
                 <a:solidFill>
                   <a:srgbClr val="18303F"/>
                 </a:solidFill>
@@ -6408,7 +7114,7 @@
               </a:defRPr>
             </a:pPr>
             <a:r>
-              <a:rPr sz="2325" b="1">
+              <a:rPr sz="2100" b="1">
                 <a:solidFill>
                   <a:srgbClr val="18303F"/>
                 </a:solidFill>
@@ -6421,7 +7127,8 @@
           </a:p>
           <a:p xmlns:a="http://schemas.openxmlformats.org/drawingml/2006/main">
             <a:pPr>
-              <a:defRPr sz="2325" b="1">
+              <a:buNone/>
+              <a:defRPr sz="2100" b="1">
                 <a:solidFill>
                   <a:srgbClr val="18303F"/>
                 </a:solidFill>
@@ -6431,7 +7138,7 @@
               </a:defRPr>
             </a:pPr>
             <a:r>
-              <a:rPr sz="2325" b="1">
+              <a:rPr sz="2100" b="1">
                 <a:solidFill>
                   <a:srgbClr val="18303F"/>
                 </a:solidFill>
@@ -6478,6 +7185,7 @@
           <a:lstStyle xmlns:a="http://schemas.openxmlformats.org/drawingml/2006/main"/>
           <a:p xmlns:a="http://schemas.openxmlformats.org/drawingml/2006/main">
             <a:pPr>
+              <a:buNone/>
               <a:defRPr sz="2175" b="1">
                 <a:solidFill>
                   <a:srgbClr val="2F6079"/>
@@ -6535,6 +7243,7 @@
           <a:lstStyle xmlns:a="http://schemas.openxmlformats.org/drawingml/2006/main"/>
           <a:p xmlns:a="http://schemas.openxmlformats.org/drawingml/2006/main">
             <a:pPr>
+              <a:buNone/>
               <a:defRPr sz="1650" b="0">
                 <a:solidFill>
                   <a:srgbClr val="526571"/>
@@ -6554,6 +7263,85 @@
                 <a:cs typeface="Arial"/>
               </a:rPr>
               <a:t>Browser saving keeps a local copy. Export and verify a backup; follow your teacher’s submission instructions.</a:t>
+            </a:r>
+          </a:p>
+        </p:txBody>
+      </p:sp>
+      <p:pic>
+        <p:nvPicPr>
+          <p:cNvPr id="22" name=""/>
+          <p:cNvPicPr>
+            <a:picLocks xmlns:a="http://schemas.openxmlformats.org/drawingml/2006/main" noChangeAspect="1"/>
+          </p:cNvPicPr>
+          <p:nvPr/>
+        </p:nvPicPr>
+        <p:blipFill>
+          <a:blip xmlns:r="http://schemas.openxmlformats.org/officeDocument/2006/relationships" xmlns:a="http://schemas.openxmlformats.org/drawingml/2006/main" r:embed="R61e67ee356d14fc7"/>
+          <a:stretch xmlns:a="http://schemas.openxmlformats.org/drawingml/2006/main"/>
+        </p:blipFill>
+        <p:spPr>
+          <a:xfrm xmlns:a="http://schemas.openxmlformats.org/drawingml/2006/main">
+            <a:off x="8286750" y="2197100"/>
+            <a:ext cx="3381375" cy="2254250"/>
+          </a:xfrm>
+          <a:prstGeom xmlns:a="http://schemas.openxmlformats.org/drawingml/2006/main" prst="rect">
+            <a:avLst/>
+          </a:prstGeom>
+        </p:spPr>
+      </p:pic>
+      <p:sp>
+        <p:nvSpPr>
+          <p:cNvPr id="12" name="">
+            <a:extLst xmlns:a="http://schemas.openxmlformats.org/drawingml/2006/main">
+              <a:ext uri="{FF2B5EF4-FFF2-40B4-BE49-F238E27FC236}">
+                <a16:creationId xmlns:a16="http://schemas.microsoft.com/office/drawing/2014/main" id="{9EEE9FF3-0F63-4E96-91F2-00E983F11BAC}"/>
+              </a:ext>
+            </a:extLst>
+          </p:cNvPr>
+          <p:cNvSpPr>
+            <a:spLocks xmlns:a="http://schemas.openxmlformats.org/drawingml/2006/main" noGrp="1"/>
+          </p:cNvSpPr>
+          <p:nvPr/>
+        </p:nvSpPr>
+        <p:spPr>
+          <a:xfrm xmlns:a="http://schemas.openxmlformats.org/drawingml/2006/main">
+            <a:off x="8286750" y="4543425"/>
+            <a:ext cx="3381375" cy="171450"/>
+          </a:xfrm>
+          <a:prstGeom xmlns:a="http://schemas.openxmlformats.org/drawingml/2006/main" prst="rect">
+            <a:avLst/>
+          </a:prstGeom>
+          <a:noFill xmlns:a="http://schemas.openxmlformats.org/drawingml/2006/main"/>
+          <a:ln xmlns:a="http://schemas.openxmlformats.org/drawingml/2006/main" w="0">
+            <a:noFill/>
+          </a:ln>
+        </p:spPr>
+        <p:txBody>
+          <a:bodyPr xmlns:a="http://schemas.openxmlformats.org/drawingml/2006/main">
+            <a:noAutofit/>
+          </a:bodyPr>
+          <a:lstStyle xmlns:a="http://schemas.openxmlformats.org/drawingml/2006/main"/>
+          <a:p xmlns:a="http://schemas.openxmlformats.org/drawingml/2006/main">
+            <a:pPr>
+              <a:defRPr sz="900">
+                <a:solidFill>
+                  <a:srgbClr val="526571"/>
+                </a:solidFill>
+                <a:latin typeface="Arial"/>
+                <a:ea typeface="Arial"/>
+                <a:cs typeface="Arial"/>
+              </a:defRPr>
+            </a:pPr>
+            <a:r>
+              <a:rPr sz="900">
+                <a:solidFill>
+                  <a:srgbClr val="526571"/>
+                </a:solidFill>
+                <a:latin typeface="Arial"/>
+                <a:ea typeface="Arial"/>
+                <a:cs typeface="Arial"/>
+              </a:rPr>
+              <a:t>AI-generated concept image</a:t>
             </a:r>
           </a:p>
         </p:txBody>
